--- a/INCREMENTO1/PPTS/Presentación documento 0.pptx
+++ b/INCREMENTO1/PPTS/Presentación documento 0.pptx
@@ -438,7 +438,7 @@
           <a:p>
             <a:fld id="{12241623-A064-4BED-B073-BA4D61433402}" type="datetime1">
               <a:rPr lang="en-US" smtClean="0"/>
-              <a:t>5/8/2025</a:t>
+              <a:t>8/22/2025</a:t>
             </a:fld>
             <a:endParaRPr lang="en-US"/>
           </a:p>
@@ -1247,7 +1247,7 @@
           <a:p>
             <a:fld id="{6F86ED0C-1DA7-41F0-94CF-6218B1FEDFF1}" type="datetime1">
               <a:rPr lang="en-US" smtClean="0"/>
-              <a:t>5/8/2025</a:t>
+              <a:t>8/22/2025</a:t>
             </a:fld>
             <a:endParaRPr lang="en-US"/>
           </a:p>
@@ -1444,7 +1444,7 @@
           <a:p>
             <a:fld id="{EECF02AB-6034-4B88-BC5A-7C17CB0EF809}" type="datetime1">
               <a:rPr lang="en-US" smtClean="0"/>
-              <a:t>5/8/2025</a:t>
+              <a:t>8/22/2025</a:t>
             </a:fld>
             <a:endParaRPr lang="en-US"/>
           </a:p>
@@ -1677,7 +1677,7 @@
           <a:p>
             <a:fld id="{22F3E5F3-28EE-488F-BD53-B744C06C3DEC}" type="datetime1">
               <a:rPr lang="en-US" smtClean="0"/>
-              <a:t>5/8/2025</a:t>
+              <a:t>8/22/2025</a:t>
             </a:fld>
             <a:endParaRPr lang="en-US"/>
           </a:p>
@@ -4369,7 +4369,7 @@
           <a:p>
             <a:fld id="{E72EB70D-CD01-44DA-83B3-8FEB3383D307}" type="datetime1">
               <a:rPr lang="en-US" smtClean="0"/>
-              <a:t>5/8/2025</a:t>
+              <a:t>8/22/2025</a:t>
             </a:fld>
             <a:endParaRPr lang="en-US"/>
           </a:p>
@@ -4562,7 +4562,7 @@
           <a:p>
             <a:fld id="{D0158CFD-9357-46BE-A189-D637A67C8730}" type="datetime1">
               <a:rPr lang="en-US" smtClean="0"/>
-              <a:t>5/8/2025</a:t>
+              <a:t>8/22/2025</a:t>
             </a:fld>
             <a:endParaRPr lang="en-US"/>
           </a:p>
@@ -4949,7 +4949,7 @@
           <a:p>
             <a:fld id="{7B4742EE-B331-4632-BD10-A82FED6B6FC0}" type="datetime1">
               <a:rPr lang="en-US" smtClean="0"/>
-              <a:t>5/8/2025</a:t>
+              <a:t>8/22/2025</a:t>
             </a:fld>
             <a:endParaRPr lang="en-US"/>
           </a:p>
@@ -5114,7 +5114,7 @@
           <a:p>
             <a:fld id="{451BA835-D13F-49F4-8F11-5D576AC65FAD}" type="datetime1">
               <a:rPr lang="en-US" smtClean="0"/>
-              <a:t>5/8/2025</a:t>
+              <a:t>8/22/2025</a:t>
             </a:fld>
             <a:endParaRPr lang="en-US"/>
           </a:p>
@@ -5237,7 +5237,7 @@
           <a:p>
             <a:fld id="{ADBD1799-ACB5-4CB2-86A2-5C574F1C8706}" type="datetime1">
               <a:rPr lang="en-US" smtClean="0"/>
-              <a:t>5/8/2025</a:t>
+              <a:t>8/22/2025</a:t>
             </a:fld>
             <a:endParaRPr lang="en-US"/>
           </a:p>
@@ -5545,7 +5545,7 @@
           <a:p>
             <a:fld id="{ED5DD0D6-7A82-473E-879B-C6ECD6CCCFEC}" type="datetime1">
               <a:rPr lang="en-US" smtClean="0"/>
-              <a:t>5/8/2025</a:t>
+              <a:t>8/22/2025</a:t>
             </a:fld>
             <a:endParaRPr lang="en-US"/>
           </a:p>
@@ -5843,7 +5843,7 @@
           <a:p>
             <a:fld id="{D4605E03-BC17-41A7-854C-DFAB672737DC}" type="datetime1">
               <a:rPr lang="en-US" smtClean="0"/>
-              <a:t>5/8/2025</a:t>
+              <a:t>8/22/2025</a:t>
             </a:fld>
             <a:endParaRPr lang="en-US"/>
           </a:p>
@@ -6093,7 +6093,7 @@
           <a:p>
             <a:fld id="{C4408324-A84C-4A45-93B6-78D079CCE772}" type="datetime1">
               <a:rPr lang="en-US" smtClean="0"/>
-              <a:t>5/8/2025</a:t>
+              <a:t>8/22/2025</a:t>
             </a:fld>
             <a:endParaRPr lang="en-US"/>
           </a:p>
@@ -7499,44 +7499,6 @@
             </a:endParaRPr>
           </a:p>
           <a:p>
-            <a:pPr rtl="0">
-              <a:spcBef>
-                <a:spcPts val="1800"/>
-              </a:spcBef>
-              <a:buNone/>
-            </a:pPr>
-            <a:r>
-              <a:rPr lang="es-CL" sz="3200" b="0" i="0" u="none" strike="noStrike" dirty="0">
-                <a:solidFill>
-                  <a:schemeClr val="tx1"/>
-                </a:solidFill>
-                <a:effectLst/>
-                <a:latin typeface="Times New Roman" panose="02020603050405020304" pitchFamily="18" charset="0"/>
-                <a:cs typeface="Times New Roman" panose="02020603050405020304" pitchFamily="18" charset="0"/>
-              </a:rPr>
-              <a:t>Catalina Vidal </a:t>
-            </a:r>
-            <a:r>
-              <a:rPr lang="es-CL" sz="3200" b="0" i="0" u="none" strike="noStrike" dirty="0" err="1">
-                <a:solidFill>
-                  <a:schemeClr val="tx1"/>
-                </a:solidFill>
-                <a:effectLst/>
-                <a:latin typeface="Times New Roman" panose="02020603050405020304" pitchFamily="18" charset="0"/>
-                <a:cs typeface="Times New Roman" panose="02020603050405020304" pitchFamily="18" charset="0"/>
-              </a:rPr>
-              <a:t>Gallardo</a:t>
-            </a:r>
-            <a:endParaRPr lang="es-CL" sz="3200" b="0" i="0" u="none" strike="noStrike" dirty="0">
-              <a:solidFill>
-                <a:schemeClr val="tx1"/>
-              </a:solidFill>
-              <a:effectLst/>
-              <a:latin typeface="Times New Roman" panose="02020603050405020304" pitchFamily="18" charset="0"/>
-              <a:cs typeface="Times New Roman" panose="02020603050405020304" pitchFamily="18" charset="0"/>
-            </a:endParaRPr>
-          </a:p>
-          <a:p>
             <a:pPr>
               <a:spcBef>
                 <a:spcPts val="1800"/>
@@ -7550,6 +7512,33 @@
                 <a:cs typeface="Times New Roman" panose="02020603050405020304" pitchFamily="18" charset="0"/>
               </a:rPr>
               <a:t>Felipe Andrés Uribe del Pino</a:t>
+            </a:r>
+          </a:p>
+          <a:p>
+            <a:pPr>
+              <a:spcBef>
+                <a:spcPts val="1800"/>
+              </a:spcBef>
+            </a:pPr>
+            <a:r>
+              <a:rPr lang="es-CL" sz="3200" dirty="0">
+                <a:solidFill>
+                  <a:schemeClr val="tx1"/>
+                </a:solidFill>
+                <a:latin typeface="Times New Roman" panose="02020603050405020304" pitchFamily="18" charset="0"/>
+                <a:cs typeface="Times New Roman" panose="02020603050405020304" pitchFamily="18" charset="0"/>
+              </a:rPr>
+              <a:t>Catalina Vidal </a:t>
+            </a:r>
+            <a:r>
+              <a:rPr lang="es-CL" sz="3200">
+                <a:solidFill>
+                  <a:schemeClr val="tx1"/>
+                </a:solidFill>
+                <a:latin typeface="Times New Roman" panose="02020603050405020304" pitchFamily="18" charset="0"/>
+                <a:cs typeface="Times New Roman" panose="02020603050405020304" pitchFamily="18" charset="0"/>
+              </a:rPr>
+              <a:t>Gallardo</a:t>
             </a:r>
             <a:endParaRPr lang="es-CL" sz="3200" b="0" dirty="0">
               <a:solidFill>
